--- a/assets/powerpoints/module-n2-classe/C1-est-ce-que-je-peux.pptx
+++ b/assets/powerpoints/module-n2-classe/C1-est-ce-que-je-peux.pptx
@@ -10480,7 +10480,97 @@
                 </a:solidFill>
                 <a:latin typeface="Verdana"/>
               </a:rPr>
-              <a:t>On dit « je peux &lt;b&gt;sortir&lt;/b&gt; », jamais « je peux je sors ». C'est vrai aussi après &lt;b&gt;devoir&lt;/b&gt; et après &lt;b&gt;il faut&lt;/b&gt; : vous devez &lt;b&gt;téléphoner&lt;/b&gt;, il faut &lt;b&gt;être&lt;/b&gt; à l'heure.</a:t>
+              <a:t>On dit « je peux </a:t>
+            </a:r>
+            <a:r>
+              <a:rPr sz="2000" b="1" i="0">
+                <a:solidFill>
+                  <a:srgbClr val="4B4F52"/>
+                </a:solidFill>
+                <a:latin typeface="Verdana"/>
+              </a:rPr>
+              <a:t>sortir</a:t>
+            </a:r>
+            <a:r>
+              <a:rPr sz="2000" b="0" i="0">
+                <a:solidFill>
+                  <a:srgbClr val="4B4F52"/>
+                </a:solidFill>
+                <a:latin typeface="Verdana"/>
+              </a:rPr>
+              <a:t> », jamais « je peux je sors ». C'est vrai aussi après </a:t>
+            </a:r>
+            <a:r>
+              <a:rPr sz="2000" b="1" i="0">
+                <a:solidFill>
+                  <a:srgbClr val="4B4F52"/>
+                </a:solidFill>
+                <a:latin typeface="Verdana"/>
+              </a:rPr>
+              <a:t>devoir</a:t>
+            </a:r>
+            <a:r>
+              <a:rPr sz="2000" b="0" i="0">
+                <a:solidFill>
+                  <a:srgbClr val="4B4F52"/>
+                </a:solidFill>
+                <a:latin typeface="Verdana"/>
+              </a:rPr>
+              <a:t> et après </a:t>
+            </a:r>
+            <a:r>
+              <a:rPr sz="2000" b="1" i="0">
+                <a:solidFill>
+                  <a:srgbClr val="4B4F52"/>
+                </a:solidFill>
+                <a:latin typeface="Verdana"/>
+              </a:rPr>
+              <a:t>il faut</a:t>
+            </a:r>
+            <a:r>
+              <a:rPr sz="2000" b="0" i="0">
+                <a:solidFill>
+                  <a:srgbClr val="4B4F52"/>
+                </a:solidFill>
+                <a:latin typeface="Verdana"/>
+              </a:rPr>
+              <a:t> : vous devez </a:t>
+            </a:r>
+            <a:r>
+              <a:rPr sz="2000" b="1" i="0">
+                <a:solidFill>
+                  <a:srgbClr val="4B4F52"/>
+                </a:solidFill>
+                <a:latin typeface="Verdana"/>
+              </a:rPr>
+              <a:t>téléphoner</a:t>
+            </a:r>
+            <a:r>
+              <a:rPr sz="2000" b="0" i="0">
+                <a:solidFill>
+                  <a:srgbClr val="4B4F52"/>
+                </a:solidFill>
+                <a:latin typeface="Verdana"/>
+              </a:rPr>
+              <a:t>, il faut </a:t>
+            </a:r>
+            <a:r>
+              <a:rPr sz="2000" b="1" i="0">
+                <a:solidFill>
+                  <a:srgbClr val="4B4F52"/>
+                </a:solidFill>
+                <a:latin typeface="Verdana"/>
+              </a:rPr>
+              <a:t>être</a:t>
+            </a:r>
+            <a:r>
+              <a:rPr sz="2000" b="0" i="0">
+                <a:solidFill>
+                  <a:srgbClr val="4B4F52"/>
+                </a:solidFill>
+                <a:latin typeface="Verdana"/>
+              </a:rPr>
+              <a:t> à l'heure.</a:t>
             </a:r>
           </a:p>
         </p:txBody>
@@ -10827,7 +10917,43 @@
                 </a:solidFill>
                 <a:latin typeface="Verdana"/>
               </a:rPr>
-              <a:t>« Est-ce que je peux ouvrir la fenêtre ? &lt;b&gt;Il fait chaud.&lt;/b&gt; » « Est-ce que je peux partir plus tôt ? &lt;b&gt;J'ai un rendez-vous.&lt;/b&gt; » Trois mots après la demande, jamais une longue explication.</a:t>
+              <a:t>« Est-ce que je peux ouvrir la fenêtre ? </a:t>
+            </a:r>
+            <a:r>
+              <a:rPr sz="2000" b="1" i="0">
+                <a:solidFill>
+                  <a:srgbClr val="4B4F52"/>
+                </a:solidFill>
+                <a:latin typeface="Verdana"/>
+              </a:rPr>
+              <a:t>Il fait chaud.</a:t>
+            </a:r>
+            <a:r>
+              <a:rPr sz="2000" b="0" i="0">
+                <a:solidFill>
+                  <a:srgbClr val="4B4F52"/>
+                </a:solidFill>
+                <a:latin typeface="Verdana"/>
+              </a:rPr>
+              <a:t> » « Est-ce que je peux partir plus tôt ? </a:t>
+            </a:r>
+            <a:r>
+              <a:rPr sz="2000" b="1" i="0">
+                <a:solidFill>
+                  <a:srgbClr val="4B4F52"/>
+                </a:solidFill>
+                <a:latin typeface="Verdana"/>
+              </a:rPr>
+              <a:t>J'ai un rendez-vous.</a:t>
+            </a:r>
+            <a:r>
+              <a:rPr sz="2000" b="0" i="0">
+                <a:solidFill>
+                  <a:srgbClr val="4B4F52"/>
+                </a:solidFill>
+                <a:latin typeface="Verdana"/>
+              </a:rPr>
+              <a:t> » Trois mots après la demande, jamais une longue explication.</a:t>
             </a:r>
           </a:p>
         </p:txBody>
